--- a/examples/ppt/tables/tables-financial.pptx
+++ b/examples/ppt/tables/tables-financial.pptx
@@ -5,10 +5,10 @@
     <p:sldMasterId xmlns:r="http://schemas.openxmlformats.org/officeDocument/2006/relationships" id="2147483648" r:id="rId1"/>
   </p:sldMasterIdLst>
   <p:sldIdLst>
-    <p:sldId id="256" r:id="Rcebabc4b94d841f8"/>
-    <p:sldId id="257" r:id="R6a32eef7c5d94597"/>
-    <p:sldId id="258" r:id="Rf015bb1cb0ed4ee1"/>
-    <p:sldId id="259" r:id="R27b2af502eba4c47"/>
+    <p:sldId id="256" r:id="R956f9541c4f74a47"/>
+    <p:sldId id="257" r:id="Redeabf4c0b714f56"/>
+    <p:sldId id="258" r:id="Rc1d0bb03ef7e420d"/>
+    <p:sldId id="259" r:id="R7fc11b264e964365"/>
   </p:sldIdLst>
   <p:sldSz cx="12192000" cy="6858000"/>
   <p:notesSz cx="6858000" cy="9144000"/>
@@ -283,7 +283,7 @@
 </file>
 
 <file path=ppt/slideMasters/slideMaster1.xml><?xml version="1.0" encoding="utf-8"?>
-<p:sldMaster xmlns:p="http://schemas.openxmlformats.org/presentationml/2006/main">
+<p:sldMaster xmlns:r="http://schemas.openxmlformats.org/officeDocument/2006/relationships" xmlns:p="http://schemas.openxmlformats.org/presentationml/2006/main">
   <p:cSld>
     <p:spTree>
       <p:nvGrpSpPr>
@@ -306,7 +306,7 @@
 </file>
 
 <file path=ppt/slides/slide1.xml><?xml version="1.0" encoding="utf-8"?>
-<p:sld xmlns:a="http://schemas.openxmlformats.org/drawingml/2006/main" xmlns:p="http://schemas.openxmlformats.org/presentationml/2006/main">
+<p:sld xmlns:p="http://schemas.openxmlformats.org/presentationml/2006/main">
   <p:cSld>
     <p:spTree>
       <p:nvGrpSpPr>
@@ -317,8 +317,8 @@
       <p:grpSpPr/>
       <p:sp>
         <p:nvSpPr>
-          <p:cNvPr id="10000" name="TextBox 1"/>
-          <p:cNvSpPr/>
+          <p:cNvPr id="100000" name="TextBox 1"/>
+          <p:cNvSpPr txBox="1"/>
           <p:nvPr/>
         </p:nvSpPr>
         <p:spPr>
@@ -329,11 +329,6 @@
           <a:prstGeom xmlns:a="http://schemas.openxmlformats.org/drawingml/2006/main" prst="rect">
             <a:avLst/>
           </a:prstGeom>
-          <a:ln xmlns:a="http://schemas.openxmlformats.org/drawingml/2006/main" w="9525">
-            <a:solidFill>
-              <a:srgbClr val="595959"/>
-            </a:solidFill>
-          </a:ln>
         </p:spPr>
         <p:txBody>
           <a:bodyPr xmlns:a="http://schemas.openxmlformats.org/drawingml/2006/main"/>
@@ -353,8 +348,8 @@
       </p:sp>
       <p:sp>
         <p:nvSpPr>
-          <p:cNvPr id="10001" name="TextBox 2"/>
-          <p:cNvSpPr/>
+          <p:cNvPr id="100001" name="TextBox 2"/>
+          <p:cNvSpPr txBox="1"/>
           <p:nvPr/>
         </p:nvSpPr>
         <p:spPr>
@@ -365,11 +360,6 @@
           <a:prstGeom xmlns:a="http://schemas.openxmlformats.org/drawingml/2006/main" prst="rect">
             <a:avLst/>
           </a:prstGeom>
-          <a:ln xmlns:a="http://schemas.openxmlformats.org/drawingml/2006/main" w="9525">
-            <a:solidFill>
-              <a:srgbClr val="595959"/>
-            </a:solidFill>
-          </a:ln>
         </p:spPr>
         <p:txBody>
           <a:bodyPr xmlns:a="http://schemas.openxmlformats.org/drawingml/2006/main"/>
@@ -393,7 +383,7 @@
 </file>
 
 <file path=ppt/slides/slide2.xml><?xml version="1.0" encoding="utf-8"?>
-<p:sld xmlns:a="http://schemas.openxmlformats.org/drawingml/2006/main" xmlns:p="http://schemas.openxmlformats.org/presentationml/2006/main">
+<p:sld xmlns:p="http://schemas.openxmlformats.org/presentationml/2006/main">
   <p:cSld>
     <p:spTree>
       <p:nvGrpSpPr>
@@ -404,8 +394,8 @@
       <p:grpSpPr/>
       <p:sp>
         <p:nvSpPr>
-          <p:cNvPr id="10002" name="TextBox 1"/>
-          <p:cNvSpPr/>
+          <p:cNvPr id="100002" name="TextBox 1"/>
+          <p:cNvSpPr txBox="1"/>
           <p:nvPr/>
         </p:nvSpPr>
         <p:spPr>
@@ -416,11 +406,6 @@
           <a:prstGeom xmlns:a="http://schemas.openxmlformats.org/drawingml/2006/main" prst="rect">
             <a:avLst/>
           </a:prstGeom>
-          <a:ln xmlns:a="http://schemas.openxmlformats.org/drawingml/2006/main" w="9525">
-            <a:solidFill>
-              <a:srgbClr val="595959"/>
-            </a:solidFill>
-          </a:ln>
         </p:spPr>
         <p:txBody>
           <a:bodyPr xmlns:a="http://schemas.openxmlformats.org/drawingml/2006/main"/>
@@ -439,7 +424,7 @@
       </p:sp>
       <p:graphicFrame>
         <p:nvGraphicFramePr>
-          <p:cNvPr id="10003" name="Table 1"/>
+          <p:cNvPr id="100003" name="Table 1"/>
           <p:cNvGraphicFramePr/>
           <p:nvPr/>
         </p:nvGraphicFramePr>
@@ -674,7 +659,7 @@
                     <a:p>
                       <a:r>
                         <a:rPr lang="en-US"/>
-                        <a:t>  Product Sales</a:t>
+                        <a:t xml:space="preserve">  Product Sales</a:t>
                       </a:r>
                     </a:p>
                   </a:txBody>
@@ -759,7 +744,7 @@
                     <a:p>
                       <a:r>
                         <a:rPr lang="en-US"/>
-                        <a:t>  Services</a:t>
+                        <a:t xml:space="preserve">  Services</a:t>
                       </a:r>
                     </a:p>
                   </a:txBody>
@@ -844,7 +829,7 @@
                     <a:p>
                       <a:r>
                         <a:rPr lang="en-US"/>
-                        <a:t>  Licensing</a:t>
+                        <a:t xml:space="preserve">  Licensing</a:t>
                       </a:r>
                     </a:p>
                   </a:txBody>
@@ -929,7 +914,7 @@
                     <a:p>
                       <a:r>
                         <a:rPr lang="en-US"/>
-                        <a:t>  Subtotal</a:t>
+                        <a:t xml:space="preserve">  Subtotal</a:t>
                       </a:r>
                     </a:p>
                   </a:txBody>
@@ -1111,7 +1096,7 @@
                     <a:p>
                       <a:r>
                         <a:rPr lang="en-US"/>
-                        <a:t>  COGS</a:t>
+                        <a:t xml:space="preserve">  COGS</a:t>
                       </a:r>
                     </a:p>
                   </a:txBody>
@@ -1196,7 +1181,7 @@
                     <a:p>
                       <a:r>
                         <a:rPr lang="en-US"/>
-                        <a:t>  Operating</a:t>
+                        <a:t xml:space="preserve">  Operating</a:t>
                       </a:r>
                     </a:p>
                   </a:txBody>
@@ -1281,7 +1266,7 @@
                     <a:p>
                       <a:r>
                         <a:rPr lang="en-US"/>
-                        <a:t>  Subtotal</a:t>
+                        <a:t xml:space="preserve">  Subtotal</a:t>
                       </a:r>
                     </a:p>
                   </a:txBody>
@@ -1525,7 +1510,7 @@
 </file>
 
 <file path=ppt/slides/slide3.xml><?xml version="1.0" encoding="utf-8"?>
-<p:sld xmlns:a="http://schemas.openxmlformats.org/drawingml/2006/main" xmlns:p="http://schemas.openxmlformats.org/presentationml/2006/main">
+<p:sld xmlns:p="http://schemas.openxmlformats.org/presentationml/2006/main">
   <p:cSld>
     <p:spTree>
       <p:nvGrpSpPr>
@@ -1536,8 +1521,8 @@
       <p:grpSpPr/>
       <p:sp>
         <p:nvSpPr>
-          <p:cNvPr id="10004" name="TextBox 1"/>
-          <p:cNvSpPr/>
+          <p:cNvPr id="100004" name="TextBox 1"/>
+          <p:cNvSpPr txBox="1"/>
           <p:nvPr/>
         </p:nvSpPr>
         <p:spPr>
@@ -1548,11 +1533,6 @@
           <a:prstGeom xmlns:a="http://schemas.openxmlformats.org/drawingml/2006/main" prst="rect">
             <a:avLst/>
           </a:prstGeom>
-          <a:ln xmlns:a="http://schemas.openxmlformats.org/drawingml/2006/main" w="9525">
-            <a:solidFill>
-              <a:srgbClr val="595959"/>
-            </a:solidFill>
-          </a:ln>
         </p:spPr>
         <p:txBody>
           <a:bodyPr xmlns:a="http://schemas.openxmlformats.org/drawingml/2006/main"/>
@@ -1571,7 +1551,7 @@
       </p:sp>
       <p:graphicFrame>
         <p:nvGraphicFramePr>
-          <p:cNvPr id="10005" name="Table 1"/>
+          <p:cNvPr id="100005" name="Table 1"/>
           <p:cNvGraphicFramePr/>
           <p:nvPr/>
         </p:nvGraphicFramePr>
@@ -2045,7 +2025,7 @@
 </file>
 
 <file path=ppt/slides/slide4.xml><?xml version="1.0" encoding="utf-8"?>
-<p:sld xmlns:a="http://schemas.openxmlformats.org/drawingml/2006/main" xmlns:p="http://schemas.openxmlformats.org/presentationml/2006/main">
+<p:sld xmlns:p="http://schemas.openxmlformats.org/presentationml/2006/main">
   <p:cSld>
     <p:spTree>
       <p:nvGrpSpPr>
@@ -2056,8 +2036,8 @@
       <p:grpSpPr/>
       <p:sp>
         <p:nvSpPr>
-          <p:cNvPr id="10006" name="TextBox 1"/>
-          <p:cNvSpPr/>
+          <p:cNvPr id="100006" name="TextBox 1"/>
+          <p:cNvSpPr txBox="1"/>
           <p:nvPr/>
         </p:nvSpPr>
         <p:spPr>
@@ -2068,11 +2048,6 @@
           <a:prstGeom xmlns:a="http://schemas.openxmlformats.org/drawingml/2006/main" prst="rect">
             <a:avLst/>
           </a:prstGeom>
-          <a:ln xmlns:a="http://schemas.openxmlformats.org/drawingml/2006/main" w="9525">
-            <a:solidFill>
-              <a:srgbClr val="595959"/>
-            </a:solidFill>
-          </a:ln>
         </p:spPr>
         <p:txBody>
           <a:bodyPr xmlns:a="http://schemas.openxmlformats.org/drawingml/2006/main"/>
@@ -2091,7 +2066,7 @@
       </p:sp>
       <p:graphicFrame>
         <p:nvGraphicFramePr>
-          <p:cNvPr id="10007" name="Table 1"/>
+          <p:cNvPr id="100007" name="Table 1"/>
           <p:cNvGraphicFramePr/>
           <p:nvPr/>
         </p:nvGraphicFramePr>
